--- a/DataAnalysis_Track/decks/DA_S10_Describing_one_column.pptx
+++ b/DataAnalysis_Track/decks/DA_S10_Describing_one_column.pptx
@@ -482,7 +482,7 @@
 </file>
 
 <file path=ppt/notesSlides/notesSlide1.xml><?xml version="1.0" encoding="utf-8"?>
-<p:notes xmlns:a="http://schemas.openxmlformats.org/drawingml/2006/main" xmlns:p="http://schemas.openxmlformats.org/presentationml/2006/main" xmlns:r="http://schemas.openxmlformats.org/officeDocument/2006/relationships">
+<p:notes xmlns:a="http://schemas.openxmlformats.org/drawingml/2006/main" xmlns:p="http://schemas.openxmlformats.org/presentationml/2006/main">
   <p:cSld>
     <p:spTree>
       <p:nvGrpSpPr>
@@ -526,7 +526,87 @@
           <a:lstStyle/>
           <a:p>
             <a:r>
+              <a:t>TEACHING PURPOSE</a:t>
+            </a:r>
+          </a:p>
+          <a:p>
+            <a:r>
+              <a:t>Describing one column</a:t>
+            </a:r>
+          </a:p>
+          <a:p>
+            <a:r>
+              <a:t/>
+            </a:r>
+          </a:p>
+          <a:p>
+            <a:r>
+              <a:t>LECTURER CUE</a:t>
+            </a:r>
+          </a:p>
+          <a:p>
+            <a:r>
               <a:t>Start on time.</a:t>
+            </a:r>
+          </a:p>
+          <a:p>
+            <a:r>
+              <a:t/>
+            </a:r>
+          </a:p>
+          <a:p>
+            <a:r>
+              <a:t>EXPLAIN IN ORDINARY WORDS</a:t>
+            </a:r>
+          </a:p>
+          <a:p>
+            <a:r>
+              <a:t>Mean is total divided by count. Median is the middle of sorted values. A percentile locates a position in that ordered distribution; interpolation conventions can differ. Match the summary to the question.</a:t>
+            </a:r>
+          </a:p>
+          <a:p>
+            <a:r>
+              <a:t/>
+            </a:r>
+          </a:p>
+          <a:p>
+            <a:r>
+              <a:t>CHECK AND EXPECTED ANSWER</a:t>
+            </a:r>
+          </a:p>
+          <a:p>
+            <a:r>
+              <a:t>For [2,3,4,5,100], median=4 and mean=22.8. The large value pulls the mean up.</a:t>
+            </a:r>
+          </a:p>
+          <a:p>
+            <a:r>
+              <a:t/>
+            </a:r>
+          </a:p>
+          <a:p>
+            <a:r>
+              <a:t>IF LEARNERS ARE STUCK</a:t>
+            </a:r>
+          </a:p>
+          <a:p>
+            <a:r>
+              <a:t>Sort five values by hand. A skewed distribution does not make the mean wrong if the question concerns totals or expected cost.</a:t>
+            </a:r>
+          </a:p>
+          <a:p>
+            <a:r>
+              <a:t/>
+            </a:r>
+          </a:p>
+          <a:p>
+            <a:r>
+              <a:t>NEXT</a:t>
+            </a:r>
+          </a:p>
+          <a:p>
+            <a:r>
+              <a:t>Where tonight sits. Move on after a learner can explain the current example or required action.</a:t>
             </a:r>
           </a:p>
         </p:txBody>
@@ -552,7 +632,7 @@
 </file>
 
 <file path=ppt/notesSlides/notesSlide10.xml><?xml version="1.0" encoding="utf-8"?>
-<p:notes xmlns:a="http://schemas.openxmlformats.org/drawingml/2006/main" xmlns:p="http://schemas.openxmlformats.org/presentationml/2006/main" xmlns:r="http://schemas.openxmlformats.org/officeDocument/2006/relationships">
+<p:notes xmlns:a="http://schemas.openxmlformats.org/drawingml/2006/main" xmlns:p="http://schemas.openxmlformats.org/presentationml/2006/main">
   <p:cSld>
     <p:spTree>
       <p:nvGrpSpPr>
@@ -596,7 +676,117 @@
           <a:lstStyle/>
           <a:p>
             <a:r>
+              <a:t>TEACHING PURPOSE</a:t>
+            </a:r>
+          </a:p>
+          <a:p>
+            <a:r>
+              <a:t>Three shapes, and what each one allows you to say</a:t>
+            </a:r>
+          </a:p>
+          <a:p>
+            <a:r>
+              <a:t/>
+            </a:r>
+          </a:p>
+          <a:p>
+            <a:r>
+              <a:t>CONNECT</a:t>
+            </a:r>
+          </a:p>
+          <a:p>
+            <a:r>
+              <a:t>Build on the preceding slide: Percentile.</a:t>
+            </a:r>
+          </a:p>
+          <a:p>
+            <a:r>
+              <a:t/>
+            </a:r>
+          </a:p>
+          <a:p>
+            <a:r>
+              <a:t>LECTURER CUE</a:t>
+            </a:r>
+          </a:p>
+          <a:p>
+            <a:r>
               <a:t>Simulated on purpose, so the shapes are clean. Symmetric: the mean is fine. Right-skewed: use the median. Bimodal: you have two populations mixed together and no single statistic describes them.</a:t>
+            </a:r>
+          </a:p>
+          <a:p>
+            <a:r>
+              <a:t/>
+            </a:r>
+          </a:p>
+          <a:p>
+            <a:r>
+              <a:t>EXPLAIN IN ORDINARY WORDS</a:t>
+            </a:r>
+          </a:p>
+          <a:p>
+            <a:r>
+              <a:t>Mean is total divided by count. Median is the middle of sorted values. A percentile locates a position in that ordered distribution; interpolation conventions can differ. Match the summary to the question.</a:t>
+            </a:r>
+          </a:p>
+          <a:p>
+            <a:r>
+              <a:t/>
+            </a:r>
+          </a:p>
+          <a:p>
+            <a:r>
+              <a:t>CHECK AND EXPECTED ANSWER</a:t>
+            </a:r>
+          </a:p>
+          <a:p>
+            <a:r>
+              <a:t>For [2,3,4,5,100], median=4 and mean=22.8. The large value pulls the mean up.</a:t>
+            </a:r>
+          </a:p>
+          <a:p>
+            <a:r>
+              <a:t/>
+            </a:r>
+          </a:p>
+          <a:p>
+            <a:r>
+              <a:t>IF LEARNERS ARE STUCK</a:t>
+            </a:r>
+          </a:p>
+          <a:p>
+            <a:r>
+              <a:t>Sort five values by hand. A skewed distribution does not make the mean wrong if the question concerns totals or expected cost.</a:t>
+            </a:r>
+          </a:p>
+          <a:p>
+            <a:r>
+              <a:t/>
+            </a:r>
+          </a:p>
+          <a:p>
+            <a:r>
+              <a:t>READ THE VISUAL</a:t>
+            </a:r>
+          </a:p>
+          <a:p>
+            <a:r>
+              <a:t>Start with the title and labels. Read one row or mark aloud, including its unit. Let a learner read a second one before discussing the pattern. Do not infer a numerical value from an unlabelled drawing.</a:t>
+            </a:r>
+          </a:p>
+          <a:p>
+            <a:r>
+              <a:t/>
+            </a:r>
+          </a:p>
+          <a:p>
+            <a:r>
+              <a:t>NEXT</a:t>
+            </a:r>
+          </a:p>
+          <a:p>
+            <a:r>
+              <a:t>Compute all three by hand first, then trust the function. Move on after a learner can explain the current example or required action.</a:t>
             </a:r>
           </a:p>
         </p:txBody>
@@ -621,8 +811,8 @@
 </p:notes>
 </file>
 
-<file path=ppt/notesSlides/notesSlide11.xml><?xml version="1.0" encoding="utf-8"?>
-<p:notes xmlns:a="http://schemas.openxmlformats.org/drawingml/2006/main" xmlns:p="http://schemas.openxmlformats.org/presentationml/2006/main" xmlns:r="http://schemas.openxmlformats.org/officeDocument/2006/relationships">
+<file path=ppt/notesSlides/notesSlide10006.xml><?xml version="1.0" encoding="utf-8"?>
+<p:notes xmlns:a="http://schemas.openxmlformats.org/drawingml/2006/main" xmlns:p="http://schemas.openxmlformats.org/presentationml/2006/main">
   <p:cSld>
     <p:spTree>
       <p:nvGrpSpPr>
@@ -664,7 +854,61 @@
         <p:txBody>
           <a:bodyPr/>
           <a:lstStyle/>
-          <a:p/>
+          <a:p>
+            <a:r>
+              <a:t>TEACHING PURPOSE</a:t>
+            </a:r>
+          </a:p>
+          <a:p>
+            <a:r>
+              <a:t>What a statistic is, before any particular one</a:t>
+            </a:r>
+          </a:p>
+          <a:p>
+            <a:r>
+              <a:t/>
+            </a:r>
+          </a:p>
+          <a:p>
+            <a:r>
+              <a:t>CONNECT</a:t>
+            </a:r>
+          </a:p>
+          <a:p>
+            <a:r>
+              <a:t>Build on the preceding slide: What is a typical order worth?.</a:t>
+            </a:r>
+          </a:p>
+          <a:p>
+            <a:r>
+              <a:t/>
+            </a:r>
+          </a:p>
+          <a:p>
+            <a:r>
+              <a:t>DELIVER THIS SLIDE</a:t>
+            </a:r>
+          </a:p>
+          <a:p>
+            <a:r>
+              <a:t>Read the stated purpose, then point to the named example or action on the slide. Ask learners to describe what they will do before moving on. For a break slide, announce the return time; for a section divider, name the next concrete task.</a:t>
+            </a:r>
+          </a:p>
+          <a:p>
+            <a:r>
+              <a:t/>
+            </a:r>
+          </a:p>
+          <a:p>
+            <a:r>
+              <a:t>NEXT</a:t>
+            </a:r>
+          </a:p>
+          <a:p>
+            <a:r>
+              <a:t>A statistic. Move on after a learner can explain the current example or required action.</a:t>
+            </a:r>
+          </a:p>
         </p:txBody>
       </p:sp>
       <p:sp>
@@ -687,8 +931,8 @@
 </p:notes>
 </file>
 
-<file path=ppt/notesSlides/notesSlide12.xml><?xml version="1.0" encoding="utf-8"?>
-<p:notes xmlns:a="http://schemas.openxmlformats.org/drawingml/2006/main" xmlns:p="http://schemas.openxmlformats.org/presentationml/2006/main" xmlns:r="http://schemas.openxmlformats.org/officeDocument/2006/relationships">
+<file path=ppt/notesSlides/notesSlide10014.xml><?xml version="1.0" encoding="utf-8"?>
+<p:notes xmlns:a="http://schemas.openxmlformats.org/drawingml/2006/main" xmlns:p="http://schemas.openxmlformats.org/presentationml/2006/main">
   <p:cSld>
     <p:spTree>
       <p:nvGrpSpPr>
@@ -732,7 +976,57 @@
           <a:lstStyle/>
           <a:p>
             <a:r>
-              <a:t>Ten minutes.</a:t>
+              <a:t>TEACHING PURPOSE</a:t>
+            </a:r>
+          </a:p>
+          <a:p>
+            <a:r>
+              <a:t>The shape decides which statistic is honest</a:t>
+            </a:r>
+          </a:p>
+          <a:p>
+            <a:r>
+              <a:t/>
+            </a:r>
+          </a:p>
+          <a:p>
+            <a:r>
+              <a:t>CONNECT</a:t>
+            </a:r>
+          </a:p>
+          <a:p>
+            <a:r>
+              <a:t>Build on the preceding slide: Break.</a:t>
+            </a:r>
+          </a:p>
+          <a:p>
+            <a:r>
+              <a:t/>
+            </a:r>
+          </a:p>
+          <a:p>
+            <a:r>
+              <a:t>DELIVER THIS SLIDE</a:t>
+            </a:r>
+          </a:p>
+          <a:p>
+            <a:r>
+              <a:t>Read the stated purpose, then point to the named example or action on the slide. Ask learners to describe what they will do before moving on. For a break slide, announce the return time; for a section divider, name the next concrete task.</a:t>
+            </a:r>
+          </a:p>
+          <a:p>
+            <a:r>
+              <a:t/>
+            </a:r>
+          </a:p>
+          <a:p>
+            <a:r>
+              <a:t>NEXT</a:t>
+            </a:r>
+          </a:p>
+          <a:p>
+            <a:r>
+              <a:t>The same three on the real order values. Move on after a learner can explain the current example or required action.</a:t>
             </a:r>
           </a:p>
         </p:txBody>
@@ -757,8 +1051,8 @@
 </p:notes>
 </file>
 
-<file path=ppt/notesSlides/notesSlide13.xml><?xml version="1.0" encoding="utf-8"?>
-<p:notes xmlns:a="http://schemas.openxmlformats.org/drawingml/2006/main" xmlns:p="http://schemas.openxmlformats.org/presentationml/2006/main" xmlns:r="http://schemas.openxmlformats.org/officeDocument/2006/relationships">
+<file path=ppt/notesSlides/notesSlide11.xml><?xml version="1.0" encoding="utf-8"?>
+<p:notes xmlns:a="http://schemas.openxmlformats.org/drawingml/2006/main" xmlns:p="http://schemas.openxmlformats.org/presentationml/2006/main">
   <p:cSld>
     <p:spTree>
       <p:nvGrpSpPr>
@@ -800,7 +1094,91 @@
         <p:txBody>
           <a:bodyPr/>
           <a:lstStyle/>
-          <a:p/>
+          <a:p>
+            <a:r>
+              <a:t>TEACHING PURPOSE</a:t>
+            </a:r>
+          </a:p>
+          <a:p>
+            <a:r>
+              <a:t>Compute all three by hand first, then trust the function</a:t>
+            </a:r>
+          </a:p>
+          <a:p>
+            <a:r>
+              <a:t/>
+            </a:r>
+          </a:p>
+          <a:p>
+            <a:r>
+              <a:t>CONNECT</a:t>
+            </a:r>
+          </a:p>
+          <a:p>
+            <a:r>
+              <a:t>Build on the preceding slide: Three shapes, and what each one allows you to say.</a:t>
+            </a:r>
+          </a:p>
+          <a:p>
+            <a:r>
+              <a:t/>
+            </a:r>
+          </a:p>
+          <a:p>
+            <a:r>
+              <a:t>EXPLAIN IN ORDINARY WORDS</a:t>
+            </a:r>
+          </a:p>
+          <a:p>
+            <a:r>
+              <a:t>A function is a named set of instructions. def defines it; a call runs it with inputs. Parameters are input names, arguments are supplied values, and return sends the result back.</a:t>
+            </a:r>
+          </a:p>
+          <a:p>
+            <a:r>
+              <a:t/>
+            </a:r>
+          </a:p>
+          <a:p>
+            <a:r>
+              <a:t>CHECK AND EXPECTED ANSWER</a:t>
+            </a:r>
+          </a:p>
+          <a:p>
+            <a:r>
+              <a:t>Does print(8) return the number 8 to the caller? No; it displays 8 and returns None. A function needing a numeric result should return it.</a:t>
+            </a:r>
+          </a:p>
+          <a:p>
+            <a:r>
+              <a:t/>
+            </a:r>
+          </a:p>
+          <a:p>
+            <a:r>
+              <a:t>IF LEARNERS ARE STUCK</a:t>
+            </a:r>
+          </a:p>
+          <a:p>
+            <a:r>
+              <a:t>Trace one call: bind input names, run the indented body, reach return, then put the returned result back into the calling expression.</a:t>
+            </a:r>
+          </a:p>
+          <a:p>
+            <a:r>
+              <a:t/>
+            </a:r>
+          </a:p>
+          <a:p>
+            <a:r>
+              <a:t>NEXT</a:t>
+            </a:r>
+          </a:p>
+          <a:p>
+            <a:r>
+              <a:t>Break. Move on after a learner can explain the current example or required action.</a:t>
+            </a:r>
+          </a:p>
         </p:txBody>
       </p:sp>
       <p:sp>
@@ -823,8 +1201,8 @@
 </p:notes>
 </file>
 
-<file path=ppt/notesSlides/notesSlide14.xml><?xml version="1.0" encoding="utf-8"?>
-<p:notes xmlns:a="http://schemas.openxmlformats.org/drawingml/2006/main" xmlns:p="http://schemas.openxmlformats.org/presentationml/2006/main" xmlns:r="http://schemas.openxmlformats.org/officeDocument/2006/relationships">
+<file path=ppt/notesSlides/notesSlide12.xml><?xml version="1.0" encoding="utf-8"?>
+<p:notes xmlns:a="http://schemas.openxmlformats.org/drawingml/2006/main" xmlns:p="http://schemas.openxmlformats.org/presentationml/2006/main">
   <p:cSld>
     <p:spTree>
       <p:nvGrpSpPr>
@@ -866,7 +1244,61 @@
         <p:txBody>
           <a:bodyPr/>
           <a:lstStyle/>
-          <a:p/>
+          <a:p>
+            <a:r>
+              <a:t>TEACHING PURPOSE</a:t>
+            </a:r>
+          </a:p>
+          <a:p>
+            <a:r>
+              <a:t>Break</a:t>
+            </a:r>
+          </a:p>
+          <a:p>
+            <a:r>
+              <a:t/>
+            </a:r>
+          </a:p>
+          <a:p>
+            <a:r>
+              <a:t>CONNECT</a:t>
+            </a:r>
+          </a:p>
+          <a:p>
+            <a:r>
+              <a:t>Build on the preceding slide: Compute all three by hand first, then trust the function.</a:t>
+            </a:r>
+          </a:p>
+          <a:p>
+            <a:r>
+              <a:t/>
+            </a:r>
+          </a:p>
+          <a:p>
+            <a:r>
+              <a:t>LECTURER CUE</a:t>
+            </a:r>
+          </a:p>
+          <a:p>
+            <a:r>
+              <a:t>Ten minutes.</a:t>
+            </a:r>
+          </a:p>
+          <a:p>
+            <a:r>
+              <a:t/>
+            </a:r>
+          </a:p>
+          <a:p>
+            <a:r>
+              <a:t>NEXT</a:t>
+            </a:r>
+          </a:p>
+          <a:p>
+            <a:r>
+              <a:t>The shape decides which statistic is honest. Move on after a learner can explain the current example or required action.</a:t>
+            </a:r>
+          </a:p>
         </p:txBody>
       </p:sp>
       <p:sp>
@@ -889,8 +1321,8 @@
 </p:notes>
 </file>
 
-<file path=ppt/notesSlides/notesSlide15.xml><?xml version="1.0" encoding="utf-8"?>
-<p:notes xmlns:a="http://schemas.openxmlformats.org/drawingml/2006/main" xmlns:p="http://schemas.openxmlformats.org/presentationml/2006/main" xmlns:r="http://schemas.openxmlformats.org/officeDocument/2006/relationships">
+<file path=ppt/notesSlides/notesSlide13.xml><?xml version="1.0" encoding="utf-8"?>
+<p:notes xmlns:a="http://schemas.openxmlformats.org/drawingml/2006/main" xmlns:p="http://schemas.openxmlformats.org/presentationml/2006/main">
   <p:cSld>
     <p:spTree>
       <p:nvGrpSpPr>
@@ -934,7 +1366,87 @@
           <a:lstStyle/>
           <a:p>
             <a:r>
-              <a:t>All 6,000 orders from the course data. The mean sits above four orders in five, which is why it is a poor answer to "what is typical".</a:t>
+              <a:t>TEACHING PURPOSE</a:t>
+            </a:r>
+          </a:p>
+          <a:p>
+            <a:r>
+              <a:t>The same three on the real order values</a:t>
+            </a:r>
+          </a:p>
+          <a:p>
+            <a:r>
+              <a:t/>
+            </a:r>
+          </a:p>
+          <a:p>
+            <a:r>
+              <a:t>CONNECT</a:t>
+            </a:r>
+          </a:p>
+          <a:p>
+            <a:r>
+              <a:t>Build on the preceding slide: The shape decides which statistic is honest.</a:t>
+            </a:r>
+          </a:p>
+          <a:p>
+            <a:r>
+              <a:t/>
+            </a:r>
+          </a:p>
+          <a:p>
+            <a:r>
+              <a:t>EXPLAIN IN ORDINARY WORDS</a:t>
+            </a:r>
+          </a:p>
+          <a:p>
+            <a:r>
+              <a:t>Grouping puts rows sharing a key into buckets, then computes a result for each bucket. WHERE filters rows before SQL grouping; HAVING filters grouped results.</a:t>
+            </a:r>
+          </a:p>
+          <a:p>
+            <a:r>
+              <a:t/>
+            </a:r>
+          </a:p>
+          <a:p>
+            <a:r>
+              <a:t>CHECK AND EXPECTED ANSWER</a:t>
+            </a:r>
+          </a:p>
+          <a:p>
+            <a:r>
+              <a:t>Which condition keeps only groups with more than five rows? HAVING COUNT(*) &gt; 5.</a:t>
+            </a:r>
+          </a:p>
+          <a:p>
+            <a:r>
+              <a:t/>
+            </a:r>
+          </a:p>
+          <a:p>
+            <a:r>
+              <a:t>IF LEARNERS ARE STUCK</a:t>
+            </a:r>
+          </a:p>
+          <a:p>
+            <a:r>
+              <a:t>Draw two buckets and count by hand. Name the intended output grain before writing the aggregation.</a:t>
+            </a:r>
+          </a:p>
+          <a:p>
+            <a:r>
+              <a:t/>
+            </a:r>
+          </a:p>
+          <a:p>
+            <a:r>
+              <a:t>NEXT</a:t>
+            </a:r>
+          </a:p>
+          <a:p>
+            <a:r>
+              <a:t>Draw it before you choose. Move on after a learner can explain the current example or required action.</a:t>
             </a:r>
           </a:p>
         </p:txBody>
@@ -959,8 +1471,8 @@
 </p:notes>
 </file>
 
-<file path=ppt/notesSlides/notesSlide16.xml><?xml version="1.0" encoding="utf-8"?>
-<p:notes xmlns:a="http://schemas.openxmlformats.org/drawingml/2006/main" xmlns:p="http://schemas.openxmlformats.org/presentationml/2006/main" xmlns:r="http://schemas.openxmlformats.org/officeDocument/2006/relationships">
+<file path=ppt/notesSlides/notesSlide14.xml><?xml version="1.0" encoding="utf-8"?>
+<p:notes xmlns:a="http://schemas.openxmlformats.org/drawingml/2006/main" xmlns:p="http://schemas.openxmlformats.org/presentationml/2006/main">
   <p:cSld>
     <p:spTree>
       <p:nvGrpSpPr>
@@ -1004,7 +1516,87 @@
           <a:lstStyle/>
           <a:p>
             <a:r>
-              <a:t>p10, median, p90 and the largest order. Together these say more than any single statistic can, and none of them mislead.</a:t>
+              <a:t>TEACHING PURPOSE</a:t>
+            </a:r>
+          </a:p>
+          <a:p>
+            <a:r>
+              <a:t>Draw it before you choose</a:t>
+            </a:r>
+          </a:p>
+          <a:p>
+            <a:r>
+              <a:t/>
+            </a:r>
+          </a:p>
+          <a:p>
+            <a:r>
+              <a:t>CONNECT</a:t>
+            </a:r>
+          </a:p>
+          <a:p>
+            <a:r>
+              <a:t>Build on the preceding slide: The same three on the real order values.</a:t>
+            </a:r>
+          </a:p>
+          <a:p>
+            <a:r>
+              <a:t/>
+            </a:r>
+          </a:p>
+          <a:p>
+            <a:r>
+              <a:t>EXPLAIN IN ORDINARY WORDS</a:t>
+            </a:r>
+          </a:p>
+          <a:p>
+            <a:r>
+              <a:t>Mean is total divided by count. Median is the middle of sorted values. A percentile locates a position in that ordered distribution; interpolation conventions can differ. Match the summary to the question.</a:t>
+            </a:r>
+          </a:p>
+          <a:p>
+            <a:r>
+              <a:t/>
+            </a:r>
+          </a:p>
+          <a:p>
+            <a:r>
+              <a:t>CHECK AND EXPECTED ANSWER</a:t>
+            </a:r>
+          </a:p>
+          <a:p>
+            <a:r>
+              <a:t>For [2,3,4,5,100], median=4 and mean=22.8. The large value pulls the mean up.</a:t>
+            </a:r>
+          </a:p>
+          <a:p>
+            <a:r>
+              <a:t/>
+            </a:r>
+          </a:p>
+          <a:p>
+            <a:r>
+              <a:t>IF LEARNERS ARE STUCK</a:t>
+            </a:r>
+          </a:p>
+          <a:p>
+            <a:r>
+              <a:t>Sort five values by hand. A skewed distribution does not make the mean wrong if the question concerns totals or expected cost.</a:t>
+            </a:r>
+          </a:p>
+          <a:p>
+            <a:r>
+              <a:t/>
+            </a:r>
+          </a:p>
+          <a:p>
+            <a:r>
+              <a:t>NEXT</a:t>
+            </a:r>
+          </a:p>
+          <a:p>
+            <a:r>
+              <a:t>The real order values, with the mean and the median marked. Move on after a learner can explain the current example or required action.</a:t>
             </a:r>
           </a:p>
         </p:txBody>
@@ -1029,8 +1621,8 @@
 </p:notes>
 </file>
 
-<file path=ppt/notesSlides/notesSlide17.xml><?xml version="1.0" encoding="utf-8"?>
-<p:notes xmlns:a="http://schemas.openxmlformats.org/drawingml/2006/main" xmlns:p="http://schemas.openxmlformats.org/presentationml/2006/main" xmlns:r="http://schemas.openxmlformats.org/officeDocument/2006/relationships">
+<file path=ppt/notesSlides/notesSlide15.xml><?xml version="1.0" encoding="utf-8"?>
+<p:notes xmlns:a="http://schemas.openxmlformats.org/drawingml/2006/main" xmlns:p="http://schemas.openxmlformats.org/presentationml/2006/main">
   <p:cSld>
     <p:spTree>
       <p:nvGrpSpPr>
@@ -1074,7 +1666,117 @@
           <a:lstStyle/>
           <a:p>
             <a:r>
-              <a:t>Reporting a mean on a skewed distribution. It is the single commonest misleading number in business reporting.</a:t>
+              <a:t>TEACHING PURPOSE</a:t>
+            </a:r>
+          </a:p>
+          <a:p>
+            <a:r>
+              <a:t>The real order values, with the mean and the median marked</a:t>
+            </a:r>
+          </a:p>
+          <a:p>
+            <a:r>
+              <a:t/>
+            </a:r>
+          </a:p>
+          <a:p>
+            <a:r>
+              <a:t>CONNECT</a:t>
+            </a:r>
+          </a:p>
+          <a:p>
+            <a:r>
+              <a:t>Build on the preceding slide: Draw it before you choose.</a:t>
+            </a:r>
+          </a:p>
+          <a:p>
+            <a:r>
+              <a:t/>
+            </a:r>
+          </a:p>
+          <a:p>
+            <a:r>
+              <a:t>LECTURER CUE</a:t>
+            </a:r>
+          </a:p>
+          <a:p>
+            <a:r>
+              <a:t>All 6,000 orders from the course data. The mean sits above four orders in five, which is why it is a poor answer to "what is typical".</a:t>
+            </a:r>
+          </a:p>
+          <a:p>
+            <a:r>
+              <a:t/>
+            </a:r>
+          </a:p>
+          <a:p>
+            <a:r>
+              <a:t>EXPLAIN IN ORDINARY WORDS</a:t>
+            </a:r>
+          </a:p>
+          <a:p>
+            <a:r>
+              <a:t>Mean is total divided by count. Median is the middle of sorted values. A percentile locates a position in that ordered distribution; interpolation conventions can differ. Match the summary to the question.</a:t>
+            </a:r>
+          </a:p>
+          <a:p>
+            <a:r>
+              <a:t/>
+            </a:r>
+          </a:p>
+          <a:p>
+            <a:r>
+              <a:t>CHECK AND EXPECTED ANSWER</a:t>
+            </a:r>
+          </a:p>
+          <a:p>
+            <a:r>
+              <a:t>For [2,3,4,5,100], median=4 and mean=22.8. The large value pulls the mean up.</a:t>
+            </a:r>
+          </a:p>
+          <a:p>
+            <a:r>
+              <a:t/>
+            </a:r>
+          </a:p>
+          <a:p>
+            <a:r>
+              <a:t>IF LEARNERS ARE STUCK</a:t>
+            </a:r>
+          </a:p>
+          <a:p>
+            <a:r>
+              <a:t>Sort five values by hand. A skewed distribution does not make the mean wrong if the question concerns totals or expected cost.</a:t>
+            </a:r>
+          </a:p>
+          <a:p>
+            <a:r>
+              <a:t/>
+            </a:r>
+          </a:p>
+          <a:p>
+            <a:r>
+              <a:t>READ THE VISUAL</a:t>
+            </a:r>
+          </a:p>
+          <a:p>
+            <a:r>
+              <a:t>Start with the title and labels. Read one row or mark aloud, including its unit. Let a learner read a second one before discussing the pattern. Do not infer a numerical value from an unlabelled drawing.</a:t>
+            </a:r>
+          </a:p>
+          <a:p>
+            <a:r>
+              <a:t/>
+            </a:r>
+          </a:p>
+          <a:p>
+            <a:r>
+              <a:t>NEXT</a:t>
+            </a:r>
+          </a:p>
+          <a:p>
+            <a:r>
+              <a:t>Four numbers that describe the business honestly. Move on after a learner can explain the current example or required action.</a:t>
             </a:r>
           </a:p>
         </p:txBody>
@@ -1099,8 +1801,8 @@
 </p:notes>
 </file>
 
-<file path=ppt/notesSlides/notesSlide18.xml><?xml version="1.0" encoding="utf-8"?>
-<p:notes xmlns:a="http://schemas.openxmlformats.org/drawingml/2006/main" xmlns:p="http://schemas.openxmlformats.org/presentationml/2006/main" xmlns:r="http://schemas.openxmlformats.org/officeDocument/2006/relationships">
+<file path=ppt/notesSlides/notesSlide16.xml><?xml version="1.0" encoding="utf-8"?>
+<p:notes xmlns:a="http://schemas.openxmlformats.org/drawingml/2006/main" xmlns:p="http://schemas.openxmlformats.org/presentationml/2006/main">
   <p:cSld>
     <p:spTree>
       <p:nvGrpSpPr>
@@ -1142,7 +1844,76 @@
         <p:txBody>
           <a:bodyPr/>
           <a:lstStyle/>
-          <a:p/>
+          <a:p>
+            <a:r>
+              <a:t>TEACHING PURPOSE</a:t>
+            </a:r>
+          </a:p>
+          <a:p>
+            <a:r>
+              <a:t>Four numbers that describe the business honestly</a:t>
+            </a:r>
+          </a:p>
+          <a:p>
+            <a:r>
+              <a:t/>
+            </a:r>
+          </a:p>
+          <a:p>
+            <a:r>
+              <a:t>CONNECT</a:t>
+            </a:r>
+          </a:p>
+          <a:p>
+            <a:r>
+              <a:t>Build on the preceding slide: The real order values, with the mean and the median marked.</a:t>
+            </a:r>
+          </a:p>
+          <a:p>
+            <a:r>
+              <a:t/>
+            </a:r>
+          </a:p>
+          <a:p>
+            <a:r>
+              <a:t>LECTURER CUE</a:t>
+            </a:r>
+          </a:p>
+          <a:p>
+            <a:r>
+              <a:t>p10, median, p90 and the largest order. Together these say more than any single statistic can, and none of them mislead.</a:t>
+            </a:r>
+          </a:p>
+          <a:p>
+            <a:r>
+              <a:t/>
+            </a:r>
+          </a:p>
+          <a:p>
+            <a:r>
+              <a:t>READ THE VISUAL</a:t>
+            </a:r>
+          </a:p>
+          <a:p>
+            <a:r>
+              <a:t>Start with the title and labels. Read one row or mark aloud, including its unit. Let a learner read a second one before discussing the pattern. Do not infer a numerical value from an unlabelled drawing.</a:t>
+            </a:r>
+          </a:p>
+          <a:p>
+            <a:r>
+              <a:t/>
+            </a:r>
+          </a:p>
+          <a:p>
+            <a:r>
+              <a:t>NEXT</a:t>
+            </a:r>
+          </a:p>
+          <a:p>
+            <a:r>
+              <a:t>Reporting a mean on a skewed distribution. It is the single commonest misleading number in business reporting.. Move on after a learner can explain the current example or required action.</a:t>
+            </a:r>
+          </a:p>
         </p:txBody>
       </p:sp>
       <p:sp>
@@ -1165,8 +1936,8 @@
 </p:notes>
 </file>
 
-<file path=ppt/notesSlides/notesSlide19.xml><?xml version="1.0" encoding="utf-8"?>
-<p:notes xmlns:a="http://schemas.openxmlformats.org/drawingml/2006/main" xmlns:p="http://schemas.openxmlformats.org/presentationml/2006/main" xmlns:r="http://schemas.openxmlformats.org/officeDocument/2006/relationships">
+<file path=ppt/notesSlides/notesSlide17.xml><?xml version="1.0" encoding="utf-8"?>
+<p:notes xmlns:a="http://schemas.openxmlformats.org/drawingml/2006/main" xmlns:p="http://schemas.openxmlformats.org/presentationml/2006/main">
   <p:cSld>
     <p:spTree>
       <p:nvGrpSpPr>
@@ -1208,7 +1979,106 @@
         <p:txBody>
           <a:bodyPr/>
           <a:lstStyle/>
-          <a:p/>
+          <a:p>
+            <a:r>
+              <a:t>TEACHING PURPOSE</a:t>
+            </a:r>
+          </a:p>
+          <a:p>
+            <a:r>
+              <a:t>Reporting a mean on a skewed distribution. It is the single commonest misleading number in business reporting.</a:t>
+            </a:r>
+          </a:p>
+          <a:p>
+            <a:r>
+              <a:t/>
+            </a:r>
+          </a:p>
+          <a:p>
+            <a:r>
+              <a:t>CONNECT</a:t>
+            </a:r>
+          </a:p>
+          <a:p>
+            <a:r>
+              <a:t>Build on the preceding slide: Four numbers that describe the business honestly.</a:t>
+            </a:r>
+          </a:p>
+          <a:p>
+            <a:r>
+              <a:t/>
+            </a:r>
+          </a:p>
+          <a:p>
+            <a:r>
+              <a:t>LECTURER CUE</a:t>
+            </a:r>
+          </a:p>
+          <a:p>
+            <a:r>
+              <a:t>Reporting a mean on a skewed distribution. It is the single commonest misleading number in business reporting.</a:t>
+            </a:r>
+          </a:p>
+          <a:p>
+            <a:r>
+              <a:t/>
+            </a:r>
+          </a:p>
+          <a:p>
+            <a:r>
+              <a:t>EXPLAIN IN ORDINARY WORDS</a:t>
+            </a:r>
+          </a:p>
+          <a:p>
+            <a:r>
+              <a:t>Mean is total divided by count. Median is the middle of sorted values. A percentile locates a position in that ordered distribution; interpolation conventions can differ. Match the summary to the question.</a:t>
+            </a:r>
+          </a:p>
+          <a:p>
+            <a:r>
+              <a:t/>
+            </a:r>
+          </a:p>
+          <a:p>
+            <a:r>
+              <a:t>CHECK AND EXPECTED ANSWER</a:t>
+            </a:r>
+          </a:p>
+          <a:p>
+            <a:r>
+              <a:t>For [2,3,4,5,100], median=4 and mean=22.8. The large value pulls the mean up.</a:t>
+            </a:r>
+          </a:p>
+          <a:p>
+            <a:r>
+              <a:t/>
+            </a:r>
+          </a:p>
+          <a:p>
+            <a:r>
+              <a:t>IF LEARNERS ARE STUCK</a:t>
+            </a:r>
+          </a:p>
+          <a:p>
+            <a:r>
+              <a:t>Sort five values by hand. A skewed distribution does not make the mean wrong if the question concerns totals or expected cost.</a:t>
+            </a:r>
+          </a:p>
+          <a:p>
+            <a:r>
+              <a:t/>
+            </a:r>
+          </a:p>
+          <a:p>
+            <a:r>
+              <a:t>NEXT</a:t>
+            </a:r>
+          </a:p>
+          <a:p>
+            <a:r>
+              <a:t>Can you answer these?. Move on after a learner can explain the current example or required action.</a:t>
+            </a:r>
+          </a:p>
         </p:txBody>
       </p:sp>
       <p:sp>
@@ -1231,8 +2101,8 @@
 </p:notes>
 </file>
 
-<file path=ppt/notesSlides/notesSlide2.xml><?xml version="1.0" encoding="utf-8"?>
-<p:notes xmlns:a="http://schemas.openxmlformats.org/drawingml/2006/main" xmlns:p="http://schemas.openxmlformats.org/presentationml/2006/main" xmlns:r="http://schemas.openxmlformats.org/officeDocument/2006/relationships">
+<file path=ppt/notesSlides/notesSlide18.xml><?xml version="1.0" encoding="utf-8"?>
+<p:notes xmlns:a="http://schemas.openxmlformats.org/drawingml/2006/main" xmlns:p="http://schemas.openxmlformats.org/presentationml/2006/main">
   <p:cSld>
     <p:spTree>
       <p:nvGrpSpPr>
@@ -1276,7 +2146,157 @@
           <a:lstStyle/>
           <a:p>
             <a:r>
-              <a:t>Tonight is session 10 of twelve.</a:t>
+              <a:t>TEACHING PURPOSE</a:t>
+            </a:r>
+          </a:p>
+          <a:p>
+            <a:r>
+              <a:t>Can you answer these?</a:t>
+            </a:r>
+          </a:p>
+          <a:p>
+            <a:r>
+              <a:t/>
+            </a:r>
+          </a:p>
+          <a:p>
+            <a:r>
+              <a:t>CONNECT</a:t>
+            </a:r>
+          </a:p>
+          <a:p>
+            <a:r>
+              <a:t>Build on the preceding slide: Reporting a mean on a skewed distribution. It is the single commonest misleading number in business reporting..</a:t>
+            </a:r>
+          </a:p>
+          <a:p>
+            <a:r>
+              <a:t/>
+            </a:r>
+          </a:p>
+          <a:p>
+            <a:r>
+              <a:t>EXPLAIN IN ORDINARY WORDS</a:t>
+            </a:r>
+          </a:p>
+          <a:p>
+            <a:r>
+              <a:t>Mean is total divided by count. Median is the middle of sorted values. A percentile locates a position in that ordered distribution; interpolation conventions can differ. Match the summary to the question.</a:t>
+            </a:r>
+          </a:p>
+          <a:p>
+            <a:r>
+              <a:t/>
+            </a:r>
+          </a:p>
+          <a:p>
+            <a:r>
+              <a:t>CHECK AND EXPECTED ANSWER</a:t>
+            </a:r>
+          </a:p>
+          <a:p>
+            <a:r>
+              <a:t>For [2,3,4,5,100], median=4 and mean=22.8. The large value pulls the mean up.</a:t>
+            </a:r>
+          </a:p>
+          <a:p>
+            <a:r>
+              <a:t/>
+            </a:r>
+          </a:p>
+          <a:p>
+            <a:r>
+              <a:t>IF LEARNERS ARE STUCK</a:t>
+            </a:r>
+          </a:p>
+          <a:p>
+            <a:r>
+              <a:t>Sort five values by hand. A skewed distribution does not make the mean wrong if the question concerns totals or expected cost.</a:t>
+            </a:r>
+          </a:p>
+          <a:p>
+            <a:r>
+              <a:t/>
+            </a:r>
+          </a:p>
+          <a:p>
+            <a:r>
+              <a:t>DISCUSSION KEY FOR THIS SLIDE</a:t>
+            </a:r>
+          </a:p>
+          <a:p>
+            <a:r>
+              <a:t>ANSWERS</a:t>
+            </a:r>
+          </a:p>
+          <a:p>
+            <a:r>
+              <a:t>How did you do?</a:t>
+            </a:r>
+          </a:p>
+          <a:p>
+            <a:r>
+              <a:t>A</a:t>
+            </a:r>
+          </a:p>
+          <a:p>
+            <a:r>
+              <a:t>When the mean is right</a:t>
+            </a:r>
+          </a:p>
+          <a:p>
+            <a:r>
+              <a:t>When the distribution is roughly symmetric, or when you genuinely need the total divided by the count, which is what average order value is for pricing and capacity. As a description of typical, on a skewed distribution, it is wrong.</a:t>
+            </a:r>
+          </a:p>
+          <a:p>
+            <a:r>
+              <a:t>B</a:t>
+            </a:r>
+          </a:p>
+          <a:p>
+            <a:r>
+              <a:t>Is the largest order an outlier to delete?</a:t>
+            </a:r>
+          </a:p>
+          <a:p>
+            <a:r>
+              <a:t>You cannot tell from the data alone, and deleting it is a decision about the business rather than about the file. It might be a typo and it might be your most important customer. Go and ask. Describe it either way.</a:t>
+            </a:r>
+          </a:p>
+          <a:p>
+            <a:r>
+              <a:t>C</a:t>
+            </a:r>
+          </a:p>
+          <a:p>
+            <a:r>
+              <a:t>Why look at the shape first</a:t>
+            </a:r>
+          </a:p>
+          <a:p>
+            <a:r>
+              <a:t>Because the shape is what decides whether a statistic is honest. Choosing the statistic first and looking at the shape afterwards is how the mean ends up in board papers where the median belonged.</a:t>
+            </a:r>
+          </a:p>
+          <a:p>
+            <a:r>
+              <a:t>Let learners attempt first; use this to explain the reasoning, not just reveal the answer.</a:t>
+            </a:r>
+          </a:p>
+          <a:p>
+            <a:r>
+              <a:t/>
+            </a:r>
+          </a:p>
+          <a:p>
+            <a:r>
+              <a:t>NEXT</a:t>
+            </a:r>
+          </a:p>
+          <a:p>
+            <a:r>
+              <a:t>How did you do?. Move on after a learner can explain the current example or required action.</a:t>
             </a:r>
           </a:p>
         </p:txBody>
@@ -1301,8 +2321,8 @@
 </p:notes>
 </file>
 
-<file path=ppt/notesSlides/notesSlide20.xml><?xml version="1.0" encoding="utf-8"?>
-<p:notes xmlns:a="http://schemas.openxmlformats.org/drawingml/2006/main" xmlns:p="http://schemas.openxmlformats.org/presentationml/2006/main" xmlns:r="http://schemas.openxmlformats.org/officeDocument/2006/relationships">
+<file path=ppt/notesSlides/notesSlide19.xml><?xml version="1.0" encoding="utf-8"?>
+<p:notes xmlns:a="http://schemas.openxmlformats.org/drawingml/2006/main" xmlns:p="http://schemas.openxmlformats.org/presentationml/2006/main">
   <p:cSld>
     <p:spTree>
       <p:nvGrpSpPr>
@@ -1346,7 +2366,87 @@
           <a:lstStyle/>
           <a:p>
             <a:r>
-              <a:t>Pick three numeric columns from the course data. For each: draw the distribution, choose the right statistic, and write one sentence saying why the alternative would mislead.</a:t>
+              <a:t>TEACHING PURPOSE</a:t>
+            </a:r>
+          </a:p>
+          <a:p>
+            <a:r>
+              <a:t>How did you do?</a:t>
+            </a:r>
+          </a:p>
+          <a:p>
+            <a:r>
+              <a:t/>
+            </a:r>
+          </a:p>
+          <a:p>
+            <a:r>
+              <a:t>CONNECT</a:t>
+            </a:r>
+          </a:p>
+          <a:p>
+            <a:r>
+              <a:t>Build on the preceding slide: Can you answer these?.</a:t>
+            </a:r>
+          </a:p>
+          <a:p>
+            <a:r>
+              <a:t/>
+            </a:r>
+          </a:p>
+          <a:p>
+            <a:r>
+              <a:t>EXPLAIN IN ORDINARY WORDS</a:t>
+            </a:r>
+          </a:p>
+          <a:p>
+            <a:r>
+              <a:t>Mean is total divided by count. Median is the middle of sorted values. A percentile locates a position in that ordered distribution; interpolation conventions can differ. Match the summary to the question.</a:t>
+            </a:r>
+          </a:p>
+          <a:p>
+            <a:r>
+              <a:t/>
+            </a:r>
+          </a:p>
+          <a:p>
+            <a:r>
+              <a:t>CHECK AND EXPECTED ANSWER</a:t>
+            </a:r>
+          </a:p>
+          <a:p>
+            <a:r>
+              <a:t>For [2,3,4,5,100], median=4 and mean=22.8. The large value pulls the mean up.</a:t>
+            </a:r>
+          </a:p>
+          <a:p>
+            <a:r>
+              <a:t/>
+            </a:r>
+          </a:p>
+          <a:p>
+            <a:r>
+              <a:t>IF LEARNERS ARE STUCK</a:t>
+            </a:r>
+          </a:p>
+          <a:p>
+            <a:r>
+              <a:t>Sort five values by hand. A skewed distribution does not make the mean wrong if the question concerns totals or expected cost.</a:t>
+            </a:r>
+          </a:p>
+          <a:p>
+            <a:r>
+              <a:t/>
+            </a:r>
+          </a:p>
+          <a:p>
+            <a:r>
+              <a:t>NEXT</a:t>
+            </a:r>
+          </a:p>
+          <a:p>
+            <a:r>
+              <a:t>Describe three columns properly. Move on after a learner can explain the current example or required action.</a:t>
             </a:r>
           </a:p>
         </p:txBody>
@@ -1371,8 +2471,8 @@
 </p:notes>
 </file>
 
-<file path=ppt/notesSlides/notesSlide21.xml><?xml version="1.0" encoding="utf-8"?>
-<p:notes xmlns:a="http://schemas.openxmlformats.org/drawingml/2006/main" xmlns:p="http://schemas.openxmlformats.org/presentationml/2006/main" xmlns:r="http://schemas.openxmlformats.org/officeDocument/2006/relationships">
+<file path=ppt/notesSlides/notesSlide2.xml><?xml version="1.0" encoding="utf-8"?>
+<p:notes xmlns:a="http://schemas.openxmlformats.org/drawingml/2006/main" xmlns:p="http://schemas.openxmlformats.org/presentationml/2006/main">
   <p:cSld>
     <p:spTree>
       <p:nvGrpSpPr>
@@ -1414,7 +2514,106 @@
         <p:txBody>
           <a:bodyPr/>
           <a:lstStyle/>
-          <a:p/>
+          <a:p>
+            <a:r>
+              <a:t>TEACHING PURPOSE</a:t>
+            </a:r>
+          </a:p>
+          <a:p>
+            <a:r>
+              <a:t>Where tonight sits</a:t>
+            </a:r>
+          </a:p>
+          <a:p>
+            <a:r>
+              <a:t/>
+            </a:r>
+          </a:p>
+          <a:p>
+            <a:r>
+              <a:t>CONNECT</a:t>
+            </a:r>
+          </a:p>
+          <a:p>
+            <a:r>
+              <a:t>Build on the preceding slide: Describing one column.</a:t>
+            </a:r>
+          </a:p>
+          <a:p>
+            <a:r>
+              <a:t/>
+            </a:r>
+          </a:p>
+          <a:p>
+            <a:r>
+              <a:t>LECTURER CUE</a:t>
+            </a:r>
+          </a:p>
+          <a:p>
+            <a:r>
+              <a:t>Tonight is session 10 of fifteen.</a:t>
+            </a:r>
+          </a:p>
+          <a:p>
+            <a:r>
+              <a:t/>
+            </a:r>
+          </a:p>
+          <a:p>
+            <a:r>
+              <a:t>EXPLAIN IN ORDINARY WORDS</a:t>
+            </a:r>
+          </a:p>
+          <a:p>
+            <a:r>
+              <a:t>Grain means what one row represents. A key identifies a row; a primary key may use more than one column. A join matches keys, and multiple matches can multiply rows.</a:t>
+            </a:r>
+          </a:p>
+          <a:p>
+            <a:r>
+              <a:t/>
+            </a:r>
+          </a:p>
+          <a:p>
+            <a:r>
+              <a:t>CHECK AND EXPECTED ANSWER</a:t>
+            </a:r>
+          </a:p>
+          <a:p>
+            <a:r>
+              <a:t>One order has two lines. After joining orders to lines, how many rows for it? Two. Summing a repeated order-level total would double-count.</a:t>
+            </a:r>
+          </a:p>
+          <a:p>
+            <a:r>
+              <a:t/>
+            </a:r>
+          </a:p>
+          <a:p>
+            <a:r>
+              <a:t>IF LEARNERS ARE STUCK</a:t>
+            </a:r>
+          </a:p>
+          <a:p>
+            <a:r>
+              <a:t>Write one example row from each table. Circle keys and trace each match. Aggregate to the intended grain and check counts and totals.</a:t>
+            </a:r>
+          </a:p>
+          <a:p>
+            <a:r>
+              <a:t/>
+            </a:r>
+          </a:p>
+          <a:p>
+            <a:r>
+              <a:t>NEXT</a:t>
+            </a:r>
+          </a:p>
+          <a:p>
+            <a:r>
+              <a:t>The words for tonight. Move on after a learner can explain the current example or required action.</a:t>
+            </a:r>
+          </a:p>
         </p:txBody>
       </p:sp>
       <p:sp>
@@ -1437,8 +2636,8 @@
 </p:notes>
 </file>
 
-<file path=ppt/notesSlides/notesSlide22.xml><?xml version="1.0" encoding="utf-8"?>
-<p:notes xmlns:a="http://schemas.openxmlformats.org/drawingml/2006/main" xmlns:p="http://schemas.openxmlformats.org/presentationml/2006/main" xmlns:r="http://schemas.openxmlformats.org/officeDocument/2006/relationships">
+<file path=ppt/notesSlides/notesSlide20.xml><?xml version="1.0" encoding="utf-8"?>
+<p:notes xmlns:a="http://schemas.openxmlformats.org/drawingml/2006/main" xmlns:p="http://schemas.openxmlformats.org/presentationml/2006/main">
   <p:cSld>
     <p:spTree>
       <p:nvGrpSpPr>
@@ -1482,7 +2681,102 @@
           <a:lstStyle/>
           <a:p>
             <a:r>
-              <a:t>Find a number quoted in your organisation and work out which statistic it is. If it is a mean, check whether the distribution justifies one.</a:t>
+              <a:t>TEACHING PURPOSE</a:t>
+            </a:r>
+          </a:p>
+          <a:p>
+            <a:r>
+              <a:t>Describe three columns properly</a:t>
+            </a:r>
+          </a:p>
+          <a:p>
+            <a:r>
+              <a:t/>
+            </a:r>
+          </a:p>
+          <a:p>
+            <a:r>
+              <a:t>CONNECT</a:t>
+            </a:r>
+          </a:p>
+          <a:p>
+            <a:r>
+              <a:t>Build on the preceding slide: How did you do?.</a:t>
+            </a:r>
+          </a:p>
+          <a:p>
+            <a:r>
+              <a:t/>
+            </a:r>
+          </a:p>
+          <a:p>
+            <a:r>
+              <a:t>LECTURER CUE</a:t>
+            </a:r>
+          </a:p>
+          <a:p>
+            <a:r>
+              <a:t>Pick three numeric columns from the course data. For each: draw the distribution, choose the right statistic, and write one sentence saying why the alternative would mislead.</a:t>
+            </a:r>
+          </a:p>
+          <a:p>
+            <a:r>
+              <a:t/>
+            </a:r>
+          </a:p>
+          <a:p>
+            <a:r>
+              <a:t>EXPLAIN IN ORDINARY WORDS</a:t>
+            </a:r>
+          </a:p>
+          <a:p>
+            <a:r>
+              <a:t>Mean is total divided by count. Median is the middle of sorted values. A percentile locates a position in that ordered distribution; interpolation conventions can differ. Match the summary to the question.</a:t>
+            </a:r>
+          </a:p>
+          <a:p>
+            <a:r>
+              <a:t/>
+            </a:r>
+          </a:p>
+          <a:p>
+            <a:r>
+              <a:t>CHECK AND EXPECTED ANSWER</a:t>
+            </a:r>
+          </a:p>
+          <a:p>
+            <a:r>
+              <a:t>For [2,3,4,5,100], median=4 and mean=22.8. The large value pulls the mean up.</a:t>
+            </a:r>
+          </a:p>
+          <a:p>
+            <a:r>
+              <a:t/>
+            </a:r>
+          </a:p>
+          <a:p>
+            <a:r>
+              <a:t>IF LEARNERS ARE STUCK</a:t>
+            </a:r>
+          </a:p>
+          <a:p>
+            <a:r>
+              <a:t>Sort five values by hand. A skewed distribution does not make the mean wrong if the question concerns totals or expected cost.</a:t>
+            </a:r>
+          </a:p>
+          <a:p>
+            <a:r>
+              <a:t/>
+            </a:r>
+          </a:p>
+          <a:p>
+            <a:r>
+              <a:t>NEXT</a:t>
+            </a:r>
+          </a:p>
+          <a:p>
+            <a:r>
+              <a:t>What you can do now. Move on after a learner can explain the current example or required action.</a:t>
             </a:r>
           </a:p>
         </p:txBody>
@@ -1507,8 +2801,8 @@
 </p:notes>
 </file>
 
-<file path=ppt/notesSlides/notesSlide23.xml><?xml version="1.0" encoding="utf-8"?>
-<p:notes xmlns:a="http://schemas.openxmlformats.org/drawingml/2006/main" xmlns:p="http://schemas.openxmlformats.org/presentationml/2006/main" xmlns:r="http://schemas.openxmlformats.org/officeDocument/2006/relationships">
+<file path=ppt/notesSlides/notesSlide21.xml><?xml version="1.0" encoding="utf-8"?>
+<p:notes xmlns:a="http://schemas.openxmlformats.org/drawingml/2006/main" xmlns:p="http://schemas.openxmlformats.org/presentationml/2006/main">
   <p:cSld>
     <p:spTree>
       <p:nvGrpSpPr>
@@ -1552,7 +2846,87 @@
           <a:lstStyle/>
           <a:p>
             <a:r>
-              <a:t>The order is the whole lesson. A mean reported on a skewed distribution is the commonest misleading number in business, and it costs nothing to avoid once you have drawn the histogram.</a:t>
+              <a:t>TEACHING PURPOSE</a:t>
+            </a:r>
+          </a:p>
+          <a:p>
+            <a:r>
+              <a:t>What you can do now</a:t>
+            </a:r>
+          </a:p>
+          <a:p>
+            <a:r>
+              <a:t/>
+            </a:r>
+          </a:p>
+          <a:p>
+            <a:r>
+              <a:t>CONNECT</a:t>
+            </a:r>
+          </a:p>
+          <a:p>
+            <a:r>
+              <a:t>Build on the preceding slide: Describe three columns properly.</a:t>
+            </a:r>
+          </a:p>
+          <a:p>
+            <a:r>
+              <a:t/>
+            </a:r>
+          </a:p>
+          <a:p>
+            <a:r>
+              <a:t>EXPLAIN IN ORDINARY WORDS</a:t>
+            </a:r>
+          </a:p>
+          <a:p>
+            <a:r>
+              <a:t>Mean is total divided by count. Median is the middle of sorted values. A percentile locates a position in that ordered distribution; interpolation conventions can differ. Match the summary to the question.</a:t>
+            </a:r>
+          </a:p>
+          <a:p>
+            <a:r>
+              <a:t/>
+            </a:r>
+          </a:p>
+          <a:p>
+            <a:r>
+              <a:t>CHECK AND EXPECTED ANSWER</a:t>
+            </a:r>
+          </a:p>
+          <a:p>
+            <a:r>
+              <a:t>For [2,3,4,5,100], median=4 and mean=22.8. The large value pulls the mean up.</a:t>
+            </a:r>
+          </a:p>
+          <a:p>
+            <a:r>
+              <a:t/>
+            </a:r>
+          </a:p>
+          <a:p>
+            <a:r>
+              <a:t>IF LEARNERS ARE STUCK</a:t>
+            </a:r>
+          </a:p>
+          <a:p>
+            <a:r>
+              <a:t>Sort five values by hand. A skewed distribution does not make the mean wrong if the question concerns totals or expected cost.</a:t>
+            </a:r>
+          </a:p>
+          <a:p>
+            <a:r>
+              <a:t/>
+            </a:r>
+          </a:p>
+          <a:p>
+            <a:r>
+              <a:t>NEXT</a:t>
+            </a:r>
+          </a:p>
+          <a:p>
+            <a:r>
+              <a:t>Before the next session. Move on after a learner can explain the current example or required action.</a:t>
             </a:r>
           </a:p>
         </p:txBody>
@@ -1577,8 +2951,8 @@
 </p:notes>
 </file>
 
-<file path=ppt/notesSlides/notesSlide3.xml><?xml version="1.0" encoding="utf-8"?>
-<p:notes xmlns:a="http://schemas.openxmlformats.org/drawingml/2006/main" xmlns:p="http://schemas.openxmlformats.org/presentationml/2006/main" xmlns:r="http://schemas.openxmlformats.org/officeDocument/2006/relationships">
+<file path=ppt/notesSlides/notesSlide22.xml><?xml version="1.0" encoding="utf-8"?>
+<p:notes xmlns:a="http://schemas.openxmlformats.org/drawingml/2006/main" xmlns:p="http://schemas.openxmlformats.org/presentationml/2006/main">
   <p:cSld>
     <p:spTree>
       <p:nvGrpSpPr>
@@ -1620,7 +2994,106 @@
         <p:txBody>
           <a:bodyPr/>
           <a:lstStyle/>
-          <a:p/>
+          <a:p>
+            <a:r>
+              <a:t>TEACHING PURPOSE</a:t>
+            </a:r>
+          </a:p>
+          <a:p>
+            <a:r>
+              <a:t>Before the next session</a:t>
+            </a:r>
+          </a:p>
+          <a:p>
+            <a:r>
+              <a:t/>
+            </a:r>
+          </a:p>
+          <a:p>
+            <a:r>
+              <a:t>CONNECT</a:t>
+            </a:r>
+          </a:p>
+          <a:p>
+            <a:r>
+              <a:t>Build on the preceding slide: What you can do now.</a:t>
+            </a:r>
+          </a:p>
+          <a:p>
+            <a:r>
+              <a:t/>
+            </a:r>
+          </a:p>
+          <a:p>
+            <a:r>
+              <a:t>LECTURER CUE</a:t>
+            </a:r>
+          </a:p>
+          <a:p>
+            <a:r>
+              <a:t>Find a number quoted in your organisation and work out which statistic it is. If it is a mean, check whether the distribution justifies one.</a:t>
+            </a:r>
+          </a:p>
+          <a:p>
+            <a:r>
+              <a:t/>
+            </a:r>
+          </a:p>
+          <a:p>
+            <a:r>
+              <a:t>EXPLAIN IN ORDINARY WORDS</a:t>
+            </a:r>
+          </a:p>
+          <a:p>
+            <a:r>
+              <a:t>Mean is total divided by count. Median is the middle of sorted values. A percentile locates a position in that ordered distribution; interpolation conventions can differ. Match the summary to the question.</a:t>
+            </a:r>
+          </a:p>
+          <a:p>
+            <a:r>
+              <a:t/>
+            </a:r>
+          </a:p>
+          <a:p>
+            <a:r>
+              <a:t>CHECK AND EXPECTED ANSWER</a:t>
+            </a:r>
+          </a:p>
+          <a:p>
+            <a:r>
+              <a:t>For [2,3,4,5,100], median=4 and mean=22.8. The large value pulls the mean up.</a:t>
+            </a:r>
+          </a:p>
+          <a:p>
+            <a:r>
+              <a:t/>
+            </a:r>
+          </a:p>
+          <a:p>
+            <a:r>
+              <a:t>IF LEARNERS ARE STUCK</a:t>
+            </a:r>
+          </a:p>
+          <a:p>
+            <a:r>
+              <a:t>Sort five values by hand. A skewed distribution does not make the mean wrong if the question concerns totals or expected cost.</a:t>
+            </a:r>
+          </a:p>
+          <a:p>
+            <a:r>
+              <a:t/>
+            </a:r>
+          </a:p>
+          <a:p>
+            <a:r>
+              <a:t>NEXT</a:t>
+            </a:r>
+          </a:p>
+          <a:p>
+            <a:r>
+              <a:t>Look at the shape, then pick the number. Move on after a learner can explain the current example or required action.</a:t>
+            </a:r>
+          </a:p>
         </p:txBody>
       </p:sp>
       <p:sp>
@@ -1643,8 +3116,8 @@
 </p:notes>
 </file>
 
-<file path=ppt/notesSlides/notesSlide4.xml><?xml version="1.0" encoding="utf-8"?>
-<p:notes xmlns:a="http://schemas.openxmlformats.org/drawingml/2006/main" xmlns:p="http://schemas.openxmlformats.org/presentationml/2006/main" xmlns:r="http://schemas.openxmlformats.org/officeDocument/2006/relationships">
+<file path=ppt/notesSlides/notesSlide23.xml><?xml version="1.0" encoding="utf-8"?>
+<p:notes xmlns:a="http://schemas.openxmlformats.org/drawingml/2006/main" xmlns:p="http://schemas.openxmlformats.org/presentationml/2006/main">
   <p:cSld>
     <p:spTree>
       <p:nvGrpSpPr>
@@ -1688,7 +3161,87 @@
           <a:lstStyle/>
           <a:p>
             <a:r>
-              <a:t>These three are what tonight is marked against, in the sense that the lab checks them.</a:t>
+              <a:t>TEACHING PURPOSE</a:t>
+            </a:r>
+          </a:p>
+          <a:p>
+            <a:r>
+              <a:t>Look at the shape, then pick the number</a:t>
+            </a:r>
+          </a:p>
+          <a:p>
+            <a:r>
+              <a:t/>
+            </a:r>
+          </a:p>
+          <a:p>
+            <a:r>
+              <a:t>CONNECT</a:t>
+            </a:r>
+          </a:p>
+          <a:p>
+            <a:r>
+              <a:t>Build on the preceding slide: Before the next session.</a:t>
+            </a:r>
+          </a:p>
+          <a:p>
+            <a:r>
+              <a:t/>
+            </a:r>
+          </a:p>
+          <a:p>
+            <a:r>
+              <a:t>LECTURER CUE</a:t>
+            </a:r>
+          </a:p>
+          <a:p>
+            <a:r>
+              <a:t>The order is the whole lesson. A mean reported on a skewed distribution is the commonest misleading number in business, and it costs nothing to avoid once you have drawn the histogram.</a:t>
+            </a:r>
+          </a:p>
+          <a:p>
+            <a:r>
+              <a:t/>
+            </a:r>
+          </a:p>
+          <a:p>
+            <a:r>
+              <a:t>EXPLAIN IN ORDINARY WORDS</a:t>
+            </a:r>
+          </a:p>
+          <a:p>
+            <a:r>
+              <a:t>Mean is total divided by count. Median is the middle of sorted values. A percentile locates a position in that ordered distribution; interpolation conventions can differ. Match the summary to the question.</a:t>
+            </a:r>
+          </a:p>
+          <a:p>
+            <a:r>
+              <a:t/>
+            </a:r>
+          </a:p>
+          <a:p>
+            <a:r>
+              <a:t>CHECK AND EXPECTED ANSWER</a:t>
+            </a:r>
+          </a:p>
+          <a:p>
+            <a:r>
+              <a:t>For [2,3,4,5,100], median=4 and mean=22.8. The large value pulls the mean up.</a:t>
+            </a:r>
+          </a:p>
+          <a:p>
+            <a:r>
+              <a:t/>
+            </a:r>
+          </a:p>
+          <a:p>
+            <a:r>
+              <a:t>IF LEARNERS ARE STUCK</a:t>
+            </a:r>
+          </a:p>
+          <a:p>
+            <a:r>
+              <a:t>Sort five values by hand. A skewed distribution does not make the mean wrong if the question concerns totals or expected cost.</a:t>
             </a:r>
           </a:p>
         </p:txBody>
@@ -1713,8 +3266,8 @@
 </p:notes>
 </file>
 
-<file path=ppt/notesSlides/notesSlide5.xml><?xml version="1.0" encoding="utf-8"?>
-<p:notes xmlns:a="http://schemas.openxmlformats.org/drawingml/2006/main" xmlns:p="http://schemas.openxmlformats.org/presentationml/2006/main" xmlns:r="http://schemas.openxmlformats.org/officeDocument/2006/relationships">
+<file path=ppt/notesSlides/notesSlide3.xml><?xml version="1.0" encoding="utf-8"?>
+<p:notes xmlns:a="http://schemas.openxmlformats.org/drawingml/2006/main" xmlns:p="http://schemas.openxmlformats.org/presentationml/2006/main">
   <p:cSld>
     <p:spTree>
       <p:nvGrpSpPr>
@@ -1758,7 +3311,87 @@
           <a:lstStyle/>
           <a:p>
             <a:r>
-              <a:t>There are three defensible answers and they differ by a factor of five. Choosing between them is tonight.</a:t>
+              <a:t>TEACHING PURPOSE</a:t>
+            </a:r>
+          </a:p>
+          <a:p>
+            <a:r>
+              <a:t>The words for tonight</a:t>
+            </a:r>
+          </a:p>
+          <a:p>
+            <a:r>
+              <a:t/>
+            </a:r>
+          </a:p>
+          <a:p>
+            <a:r>
+              <a:t>CONNECT</a:t>
+            </a:r>
+          </a:p>
+          <a:p>
+            <a:r>
+              <a:t>Build on the preceding slide: Where tonight sits.</a:t>
+            </a:r>
+          </a:p>
+          <a:p>
+            <a:r>
+              <a:t/>
+            </a:r>
+          </a:p>
+          <a:p>
+            <a:r>
+              <a:t>EXPLAIN IN ORDINARY WORDS</a:t>
+            </a:r>
+          </a:p>
+          <a:p>
+            <a:r>
+              <a:t>Mean is total divided by count. Median is the middle of sorted values. A percentile locates a position in that ordered distribution; interpolation conventions can differ. Match the summary to the question.</a:t>
+            </a:r>
+          </a:p>
+          <a:p>
+            <a:r>
+              <a:t/>
+            </a:r>
+          </a:p>
+          <a:p>
+            <a:r>
+              <a:t>CHECK AND EXPECTED ANSWER</a:t>
+            </a:r>
+          </a:p>
+          <a:p>
+            <a:r>
+              <a:t>For [2,3,4,5,100], median=4 and mean=22.8. The large value pulls the mean up.</a:t>
+            </a:r>
+          </a:p>
+          <a:p>
+            <a:r>
+              <a:t/>
+            </a:r>
+          </a:p>
+          <a:p>
+            <a:r>
+              <a:t>IF LEARNERS ARE STUCK</a:t>
+            </a:r>
+          </a:p>
+          <a:p>
+            <a:r>
+              <a:t>Sort five values by hand. A skewed distribution does not make the mean wrong if the question concerns totals or expected cost.</a:t>
+            </a:r>
+          </a:p>
+          <a:p>
+            <a:r>
+              <a:t/>
+            </a:r>
+          </a:p>
+          <a:p>
+            <a:r>
+              <a:t>NEXT</a:t>
+            </a:r>
+          </a:p>
+          <a:p>
+            <a:r>
+              <a:t>By the end of tonight you can…. Move on after a learner can explain the current example or required action.</a:t>
             </a:r>
           </a:p>
         </p:txBody>
@@ -1783,8 +3416,8 @@
 </p:notes>
 </file>
 
-<file path=ppt/notesSlides/notesSlide6.xml><?xml version="1.0" encoding="utf-8"?>
-<p:notes xmlns:a="http://schemas.openxmlformats.org/drawingml/2006/main" xmlns:p="http://schemas.openxmlformats.org/presentationml/2006/main" xmlns:r="http://schemas.openxmlformats.org/officeDocument/2006/relationships">
+<file path=ppt/notesSlides/notesSlide4.xml><?xml version="1.0" encoding="utf-8"?>
+<p:notes xmlns:a="http://schemas.openxmlformats.org/drawingml/2006/main" xmlns:p="http://schemas.openxmlformats.org/presentationml/2006/main">
   <p:cSld>
     <p:spTree>
       <p:nvGrpSpPr>
@@ -1828,7 +3461,102 @@
           <a:lstStyle/>
           <a:p>
             <a:r>
-              <a:t>One number standing in for many. Every statistic throws information away, which is exactly what makes it useful and exactly what makes it dangerous.</a:t>
+              <a:t>TEACHING PURPOSE</a:t>
+            </a:r>
+          </a:p>
+          <a:p>
+            <a:r>
+              <a:t>By the end of tonight you can…</a:t>
+            </a:r>
+          </a:p>
+          <a:p>
+            <a:r>
+              <a:t/>
+            </a:r>
+          </a:p>
+          <a:p>
+            <a:r>
+              <a:t>CONNECT</a:t>
+            </a:r>
+          </a:p>
+          <a:p>
+            <a:r>
+              <a:t>Build on the preceding slide: The words for tonight.</a:t>
+            </a:r>
+          </a:p>
+          <a:p>
+            <a:r>
+              <a:t/>
+            </a:r>
+          </a:p>
+          <a:p>
+            <a:r>
+              <a:t>LECTURER CUE</a:t>
+            </a:r>
+          </a:p>
+          <a:p>
+            <a:r>
+              <a:t>These three are what tonight is marked against, in the sense that the lab checks them.</a:t>
+            </a:r>
+          </a:p>
+          <a:p>
+            <a:r>
+              <a:t/>
+            </a:r>
+          </a:p>
+          <a:p>
+            <a:r>
+              <a:t>EXPLAIN IN ORDINARY WORDS</a:t>
+            </a:r>
+          </a:p>
+          <a:p>
+            <a:r>
+              <a:t>Mean is total divided by count. Median is the middle of sorted values. A percentile locates a position in that ordered distribution; interpolation conventions can differ. Match the summary to the question.</a:t>
+            </a:r>
+          </a:p>
+          <a:p>
+            <a:r>
+              <a:t/>
+            </a:r>
+          </a:p>
+          <a:p>
+            <a:r>
+              <a:t>CHECK AND EXPECTED ANSWER</a:t>
+            </a:r>
+          </a:p>
+          <a:p>
+            <a:r>
+              <a:t>For [2,3,4,5,100], median=4 and mean=22.8. The large value pulls the mean up.</a:t>
+            </a:r>
+          </a:p>
+          <a:p>
+            <a:r>
+              <a:t/>
+            </a:r>
+          </a:p>
+          <a:p>
+            <a:r>
+              <a:t>IF LEARNERS ARE STUCK</a:t>
+            </a:r>
+          </a:p>
+          <a:p>
+            <a:r>
+              <a:t>Sort five values by hand. A skewed distribution does not make the mean wrong if the question concerns totals or expected cost.</a:t>
+            </a:r>
+          </a:p>
+          <a:p>
+            <a:r>
+              <a:t/>
+            </a:r>
+          </a:p>
+          <a:p>
+            <a:r>
+              <a:t>NEXT</a:t>
+            </a:r>
+          </a:p>
+          <a:p>
+            <a:r>
+              <a:t>What is a typical order worth?. Move on after a learner can explain the current example or required action.</a:t>
             </a:r>
           </a:p>
         </p:txBody>
@@ -1853,8 +3581,8 @@
 </p:notes>
 </file>
 
-<file path=ppt/notesSlides/notesSlide7.xml><?xml version="1.0" encoding="utf-8"?>
-<p:notes xmlns:a="http://schemas.openxmlformats.org/drawingml/2006/main" xmlns:p="http://schemas.openxmlformats.org/presentationml/2006/main" xmlns:r="http://schemas.openxmlformats.org/officeDocument/2006/relationships">
+<file path=ppt/notesSlides/notesSlide5.xml><?xml version="1.0" encoding="utf-8"?>
+<p:notes xmlns:a="http://schemas.openxmlformats.org/drawingml/2006/main" xmlns:p="http://schemas.openxmlformats.org/presentationml/2006/main">
   <p:cSld>
     <p:spTree>
       <p:nvGrpSpPr>
@@ -1898,7 +3626,102 @@
           <a:lstStyle/>
           <a:p>
             <a:r>
-              <a:t>The mean is the total divided by the count. The median is the middle value when you line them all up. The mode is the commonest value.</a:t>
+              <a:t>TEACHING PURPOSE</a:t>
+            </a:r>
+          </a:p>
+          <a:p>
+            <a:r>
+              <a:t>What is a typical order worth?</a:t>
+            </a:r>
+          </a:p>
+          <a:p>
+            <a:r>
+              <a:t/>
+            </a:r>
+          </a:p>
+          <a:p>
+            <a:r>
+              <a:t>CONNECT</a:t>
+            </a:r>
+          </a:p>
+          <a:p>
+            <a:r>
+              <a:t>Build on the preceding slide: By the end of tonight you can….</a:t>
+            </a:r>
+          </a:p>
+          <a:p>
+            <a:r>
+              <a:t/>
+            </a:r>
+          </a:p>
+          <a:p>
+            <a:r>
+              <a:t>LECTURER CUE</a:t>
+            </a:r>
+          </a:p>
+          <a:p>
+            <a:r>
+              <a:t>There are three defensible answers and they differ by a factor of five. Choosing between them is tonight.</a:t>
+            </a:r>
+          </a:p>
+          <a:p>
+            <a:r>
+              <a:t/>
+            </a:r>
+          </a:p>
+          <a:p>
+            <a:r>
+              <a:t>EXPLAIN IN ORDINARY WORDS</a:t>
+            </a:r>
+          </a:p>
+          <a:p>
+            <a:r>
+              <a:t>Mean is total divided by count. Median is the middle of sorted values. A percentile locates a position in that ordered distribution; interpolation conventions can differ. Match the summary to the question.</a:t>
+            </a:r>
+          </a:p>
+          <a:p>
+            <a:r>
+              <a:t/>
+            </a:r>
+          </a:p>
+          <a:p>
+            <a:r>
+              <a:t>CHECK AND EXPECTED ANSWER</a:t>
+            </a:r>
+          </a:p>
+          <a:p>
+            <a:r>
+              <a:t>For [2,3,4,5,100], median=4 and mean=22.8. The large value pulls the mean up.</a:t>
+            </a:r>
+          </a:p>
+          <a:p>
+            <a:r>
+              <a:t/>
+            </a:r>
+          </a:p>
+          <a:p>
+            <a:r>
+              <a:t>IF LEARNERS ARE STUCK</a:t>
+            </a:r>
+          </a:p>
+          <a:p>
+            <a:r>
+              <a:t>Sort five values by hand. A skewed distribution does not make the mean wrong if the question concerns totals or expected cost.</a:t>
+            </a:r>
+          </a:p>
+          <a:p>
+            <a:r>
+              <a:t/>
+            </a:r>
+          </a:p>
+          <a:p>
+            <a:r>
+              <a:t>NEXT</a:t>
+            </a:r>
+          </a:p>
+          <a:p>
+            <a:r>
+              <a:t>What a statistic is, before any particular one. Move on after a learner can explain the current example or required action.</a:t>
             </a:r>
           </a:p>
         </p:txBody>
@@ -1923,8 +3746,8 @@
 </p:notes>
 </file>
 
-<file path=ppt/notesSlides/notesSlide8.xml><?xml version="1.0" encoding="utf-8"?>
-<p:notes xmlns:a="http://schemas.openxmlformats.org/drawingml/2006/main" xmlns:p="http://schemas.openxmlformats.org/presentationml/2006/main" xmlns:r="http://schemas.openxmlformats.org/officeDocument/2006/relationships">
+<file path=ppt/notesSlides/notesSlide6.xml><?xml version="1.0" encoding="utf-8"?>
+<p:notes xmlns:a="http://schemas.openxmlformats.org/drawingml/2006/main" xmlns:p="http://schemas.openxmlformats.org/presentationml/2006/main">
   <p:cSld>
     <p:spTree>
       <p:nvGrpSpPr>
@@ -1968,7 +3791,102 @@
           <a:lstStyle/>
           <a:p>
             <a:r>
-              <a:t>The shape you get when you count how many values fall in each band. It is the thing you should look at before choosing any statistic at all.</a:t>
+              <a:t>TEACHING PURPOSE</a:t>
+            </a:r>
+          </a:p>
+          <a:p>
+            <a:r>
+              <a:t>A statistic</a:t>
+            </a:r>
+          </a:p>
+          <a:p>
+            <a:r>
+              <a:t/>
+            </a:r>
+          </a:p>
+          <a:p>
+            <a:r>
+              <a:t>CONNECT</a:t>
+            </a:r>
+          </a:p>
+          <a:p>
+            <a:r>
+              <a:t>Build on the preceding slide: What a statistic is, before any particular one.</a:t>
+            </a:r>
+          </a:p>
+          <a:p>
+            <a:r>
+              <a:t/>
+            </a:r>
+          </a:p>
+          <a:p>
+            <a:r>
+              <a:t>LECTURER CUE</a:t>
+            </a:r>
+          </a:p>
+          <a:p>
+            <a:r>
+              <a:t>One number standing in for many. Every statistic throws information away, which is exactly what makes it useful and exactly what makes it dangerous.</a:t>
+            </a:r>
+          </a:p>
+          <a:p>
+            <a:r>
+              <a:t/>
+            </a:r>
+          </a:p>
+          <a:p>
+            <a:r>
+              <a:t>EXPLAIN IN ORDINARY WORDS</a:t>
+            </a:r>
+          </a:p>
+          <a:p>
+            <a:r>
+              <a:t>An observation describes the data. A finding answers a defined question with evidence. A recommendation adds an action, its justification and limits.</a:t>
+            </a:r>
+          </a:p>
+          <a:p>
+            <a:r>
+              <a:t/>
+            </a:r>
+          </a:p>
+          <a:p>
+            <a:r>
+              <a:t>CHECK AND EXPECTED ANSWER</a:t>
+            </a:r>
+          </a:p>
+          <a:p>
+            <a:r>
+              <a:t>Does a difference between two groups prove one caused the other? No. Other differences or selection may explain it.</a:t>
+            </a:r>
+          </a:p>
+          <a:p>
+            <a:r>
+              <a:t/>
+            </a:r>
+          </a:p>
+          <a:p>
+            <a:r>
+              <a:t>IF LEARNERS ARE STUCK</a:t>
+            </a:r>
+          </a:p>
+          <a:p>
+            <a:r>
+              <a:t>Ask for the population, time period, number and comparison. Then ask what additional evidence could change the recommendation.</a:t>
+            </a:r>
+          </a:p>
+          <a:p>
+            <a:r>
+              <a:t/>
+            </a:r>
+          </a:p>
+          <a:p>
+            <a:r>
+              <a:t>NEXT</a:t>
+            </a:r>
+          </a:p>
+          <a:p>
+            <a:r>
+              <a:t>Mean, median and mode. Move on after a learner can explain the current example or required action.</a:t>
             </a:r>
           </a:p>
         </p:txBody>
@@ -1993,8 +3911,8 @@
 </p:notes>
 </file>
 
-<file path=ppt/notesSlides/notesSlide9.xml><?xml version="1.0" encoding="utf-8"?>
-<p:notes xmlns:a="http://schemas.openxmlformats.org/drawingml/2006/main" xmlns:p="http://schemas.openxmlformats.org/presentationml/2006/main" xmlns:r="http://schemas.openxmlformats.org/officeDocument/2006/relationships">
+<file path=ppt/notesSlides/notesSlide7.xml><?xml version="1.0" encoding="utf-8"?>
+<p:notes xmlns:a="http://schemas.openxmlformats.org/drawingml/2006/main" xmlns:p="http://schemas.openxmlformats.org/presentationml/2006/main">
   <p:cSld>
     <p:spTree>
       <p:nvGrpSpPr>
@@ -2038,7 +3956,432 @@
           <a:lstStyle/>
           <a:p>
             <a:r>
+              <a:t>TEACHING PURPOSE</a:t>
+            </a:r>
+          </a:p>
+          <a:p>
+            <a:r>
+              <a:t>Mean, median and mode</a:t>
+            </a:r>
+          </a:p>
+          <a:p>
+            <a:r>
+              <a:t/>
+            </a:r>
+          </a:p>
+          <a:p>
+            <a:r>
+              <a:t>CONNECT</a:t>
+            </a:r>
+          </a:p>
+          <a:p>
+            <a:r>
+              <a:t>Build on the preceding slide: A statistic.</a:t>
+            </a:r>
+          </a:p>
+          <a:p>
+            <a:r>
+              <a:t/>
+            </a:r>
+          </a:p>
+          <a:p>
+            <a:r>
+              <a:t>LECTURER CUE</a:t>
+            </a:r>
+          </a:p>
+          <a:p>
+            <a:r>
+              <a:t>The mean is the total divided by the count. The median is the middle value when you line them all up. The mode is the commonest value.</a:t>
+            </a:r>
+          </a:p>
+          <a:p>
+            <a:r>
+              <a:t/>
+            </a:r>
+          </a:p>
+          <a:p>
+            <a:r>
+              <a:t>EXPLAIN IN ORDINARY WORDS</a:t>
+            </a:r>
+          </a:p>
+          <a:p>
+            <a:r>
+              <a:t>Mean is total divided by count. Median is the middle of sorted values. A percentile locates a position in that ordered distribution; interpolation conventions can differ. Match the summary to the question.</a:t>
+            </a:r>
+          </a:p>
+          <a:p>
+            <a:r>
+              <a:t/>
+            </a:r>
+          </a:p>
+          <a:p>
+            <a:r>
+              <a:t>CHECK AND EXPECTED ANSWER</a:t>
+            </a:r>
+          </a:p>
+          <a:p>
+            <a:r>
+              <a:t>For [2,3,4,5,100], median=4 and mean=22.8. The large value pulls the mean up.</a:t>
+            </a:r>
+          </a:p>
+          <a:p>
+            <a:r>
+              <a:t/>
+            </a:r>
+          </a:p>
+          <a:p>
+            <a:r>
+              <a:t>IF LEARNERS ARE STUCK</a:t>
+            </a:r>
+          </a:p>
+          <a:p>
+            <a:r>
+              <a:t>Sort five values by hand. A skewed distribution does not make the mean wrong if the question concerns totals or expected cost.</a:t>
+            </a:r>
+          </a:p>
+          <a:p>
+            <a:r>
+              <a:t/>
+            </a:r>
+          </a:p>
+          <a:p>
+            <a:r>
+              <a:t>NEXT</a:t>
+            </a:r>
+          </a:p>
+          <a:p>
+            <a:r>
+              <a:t>Distribution. Move on after a learner can explain the current example or required action.</a:t>
+            </a:r>
+          </a:p>
+        </p:txBody>
+      </p:sp>
+      <p:sp>
+        <p:nvSpPr>
+          <p:cNvPr id="4" name="Slide Number Placeholder 3"/>
+          <p:cNvSpPr>
+            <a:spLocks noGrp="1"/>
+          </p:cNvSpPr>
+          <p:nvPr>
+            <p:ph type="sldNum" idx="5" sz="quarter"/>
+          </p:nvPr>
+        </p:nvSpPr>
+        <p:spPr/>
+      </p:sp>
+    </p:spTree>
+  </p:cSld>
+  <p:clrMapOvr>
+    <a:masterClrMapping/>
+  </p:clrMapOvr>
+</p:notes>
+</file>
+
+<file path=ppt/notesSlides/notesSlide8.xml><?xml version="1.0" encoding="utf-8"?>
+<p:notes xmlns:a="http://schemas.openxmlformats.org/drawingml/2006/main" xmlns:p="http://schemas.openxmlformats.org/presentationml/2006/main">
+  <p:cSld>
+    <p:spTree>
+      <p:nvGrpSpPr>
+        <p:cNvPr id="1" name=""/>
+        <p:cNvGrpSpPr/>
+        <p:nvPr/>
+      </p:nvGrpSpPr>
+      <p:grpSpPr>
+        <a:xfrm>
+          <a:off x="0" y="0"/>
+          <a:ext cx="0" cy="0"/>
+          <a:chOff x="0" y="0"/>
+          <a:chExt cx="0" cy="0"/>
+        </a:xfrm>
+      </p:grpSpPr>
+      <p:sp>
+        <p:nvSpPr>
+          <p:cNvPr id="2" name="Slide Image Placeholder 1"/>
+          <p:cNvSpPr>
+            <a:spLocks noGrp="1"/>
+          </p:cNvSpPr>
+          <p:nvPr>
+            <p:ph type="sldImg" idx="2"/>
+          </p:nvPr>
+        </p:nvSpPr>
+        <p:spPr/>
+      </p:sp>
+      <p:sp>
+        <p:nvSpPr>
+          <p:cNvPr id="3" name="Notes Placeholder 2"/>
+          <p:cNvSpPr>
+            <a:spLocks noGrp="1"/>
+          </p:cNvSpPr>
+          <p:nvPr>
+            <p:ph type="body" idx="3" sz="quarter"/>
+          </p:nvPr>
+        </p:nvSpPr>
+        <p:spPr/>
+        <p:txBody>
+          <a:bodyPr/>
+          <a:lstStyle/>
+          <a:p>
+            <a:r>
+              <a:t>TEACHING PURPOSE</a:t>
+            </a:r>
+          </a:p>
+          <a:p>
+            <a:r>
+              <a:t>Distribution</a:t>
+            </a:r>
+          </a:p>
+          <a:p>
+            <a:r>
+              <a:t/>
+            </a:r>
+          </a:p>
+          <a:p>
+            <a:r>
+              <a:t>CONNECT</a:t>
+            </a:r>
+          </a:p>
+          <a:p>
+            <a:r>
+              <a:t>Build on the preceding slide: Mean, median and mode.</a:t>
+            </a:r>
+          </a:p>
+          <a:p>
+            <a:r>
+              <a:t/>
+            </a:r>
+          </a:p>
+          <a:p>
+            <a:r>
+              <a:t>LECTURER CUE</a:t>
+            </a:r>
+          </a:p>
+          <a:p>
+            <a:r>
+              <a:t>The shape you get when you count how many values fall in each band. It is the thing you should look at before choosing any statistic at all.</a:t>
+            </a:r>
+          </a:p>
+          <a:p>
+            <a:r>
+              <a:t/>
+            </a:r>
+          </a:p>
+          <a:p>
+            <a:r>
+              <a:t>EXPLAIN IN ORDINARY WORDS</a:t>
+            </a:r>
+          </a:p>
+          <a:p>
+            <a:r>
+              <a:t>Mean is total divided by count. Median is the middle of sorted values. A percentile locates a position in that ordered distribution; interpolation conventions can differ. Match the summary to the question.</a:t>
+            </a:r>
+          </a:p>
+          <a:p>
+            <a:r>
+              <a:t/>
+            </a:r>
+          </a:p>
+          <a:p>
+            <a:r>
+              <a:t>CHECK AND EXPECTED ANSWER</a:t>
+            </a:r>
+          </a:p>
+          <a:p>
+            <a:r>
+              <a:t>For [2,3,4,5,100], median=4 and mean=22.8. The large value pulls the mean up.</a:t>
+            </a:r>
+          </a:p>
+          <a:p>
+            <a:r>
+              <a:t/>
+            </a:r>
+          </a:p>
+          <a:p>
+            <a:r>
+              <a:t>IF LEARNERS ARE STUCK</a:t>
+            </a:r>
+          </a:p>
+          <a:p>
+            <a:r>
+              <a:t>Sort five values by hand. A skewed distribution does not make the mean wrong if the question concerns totals or expected cost.</a:t>
+            </a:r>
+          </a:p>
+          <a:p>
+            <a:r>
+              <a:t/>
+            </a:r>
+          </a:p>
+          <a:p>
+            <a:r>
+              <a:t>NEXT</a:t>
+            </a:r>
+          </a:p>
+          <a:p>
+            <a:r>
+              <a:t>Percentile. Move on after a learner can explain the current example or required action.</a:t>
+            </a:r>
+          </a:p>
+        </p:txBody>
+      </p:sp>
+      <p:sp>
+        <p:nvSpPr>
+          <p:cNvPr id="4" name="Slide Number Placeholder 3"/>
+          <p:cNvSpPr>
+            <a:spLocks noGrp="1"/>
+          </p:cNvSpPr>
+          <p:nvPr>
+            <p:ph type="sldNum" idx="5" sz="quarter"/>
+          </p:nvPr>
+        </p:nvSpPr>
+        <p:spPr/>
+      </p:sp>
+    </p:spTree>
+  </p:cSld>
+  <p:clrMapOvr>
+    <a:masterClrMapping/>
+  </p:clrMapOvr>
+</p:notes>
+</file>
+
+<file path=ppt/notesSlides/notesSlide9.xml><?xml version="1.0" encoding="utf-8"?>
+<p:notes xmlns:a="http://schemas.openxmlformats.org/drawingml/2006/main" xmlns:p="http://schemas.openxmlformats.org/presentationml/2006/main">
+  <p:cSld>
+    <p:spTree>
+      <p:nvGrpSpPr>
+        <p:cNvPr id="1" name=""/>
+        <p:cNvGrpSpPr/>
+        <p:nvPr/>
+      </p:nvGrpSpPr>
+      <p:grpSpPr>
+        <a:xfrm>
+          <a:off x="0" y="0"/>
+          <a:ext cx="0" cy="0"/>
+          <a:chOff x="0" y="0"/>
+          <a:chExt cx="0" cy="0"/>
+        </a:xfrm>
+      </p:grpSpPr>
+      <p:sp>
+        <p:nvSpPr>
+          <p:cNvPr id="2" name="Slide Image Placeholder 1"/>
+          <p:cNvSpPr>
+            <a:spLocks noGrp="1"/>
+          </p:cNvSpPr>
+          <p:nvPr>
+            <p:ph type="sldImg" idx="2"/>
+          </p:nvPr>
+        </p:nvSpPr>
+        <p:spPr/>
+      </p:sp>
+      <p:sp>
+        <p:nvSpPr>
+          <p:cNvPr id="3" name="Notes Placeholder 2"/>
+          <p:cNvSpPr>
+            <a:spLocks noGrp="1"/>
+          </p:cNvSpPr>
+          <p:nvPr>
+            <p:ph type="body" idx="3" sz="quarter"/>
+          </p:nvPr>
+        </p:nvSpPr>
+        <p:spPr/>
+        <p:txBody>
+          <a:bodyPr/>
+          <a:lstStyle/>
+          <a:p>
+            <a:r>
+              <a:t>TEACHING PURPOSE</a:t>
+            </a:r>
+          </a:p>
+          <a:p>
+            <a:r>
+              <a:t>Percentile</a:t>
+            </a:r>
+          </a:p>
+          <a:p>
+            <a:r>
+              <a:t/>
+            </a:r>
+          </a:p>
+          <a:p>
+            <a:r>
+              <a:t>CONNECT</a:t>
+            </a:r>
+          </a:p>
+          <a:p>
+            <a:r>
+              <a:t>Build on the preceding slide: Distribution.</a:t>
+            </a:r>
+          </a:p>
+          <a:p>
+            <a:r>
+              <a:t/>
+            </a:r>
+          </a:p>
+          <a:p>
+            <a:r>
+              <a:t>LECTURER CUE</a:t>
+            </a:r>
+          </a:p>
+          <a:p>
+            <a:r>
               <a:t>The value below which a given share of the data falls. The 90th percentile is bigger than nine values in ten.</a:t>
+            </a:r>
+          </a:p>
+          <a:p>
+            <a:r>
+              <a:t/>
+            </a:r>
+          </a:p>
+          <a:p>
+            <a:r>
+              <a:t>EXPLAIN IN ORDINARY WORDS</a:t>
+            </a:r>
+          </a:p>
+          <a:p>
+            <a:r>
+              <a:t>Mean is total divided by count. Median is the middle of sorted values. A percentile locates a position in that ordered distribution; interpolation conventions can differ. Match the summary to the question.</a:t>
+            </a:r>
+          </a:p>
+          <a:p>
+            <a:r>
+              <a:t/>
+            </a:r>
+          </a:p>
+          <a:p>
+            <a:r>
+              <a:t>CHECK AND EXPECTED ANSWER</a:t>
+            </a:r>
+          </a:p>
+          <a:p>
+            <a:r>
+              <a:t>For [2,3,4,5,100], median=4 and mean=22.8. The large value pulls the mean up.</a:t>
+            </a:r>
+          </a:p>
+          <a:p>
+            <a:r>
+              <a:t/>
+            </a:r>
+          </a:p>
+          <a:p>
+            <a:r>
+              <a:t>IF LEARNERS ARE STUCK</a:t>
+            </a:r>
+          </a:p>
+          <a:p>
+            <a:r>
+              <a:t>Sort five values by hand. A skewed distribution does not make the mean wrong if the question concerns totals or expected cost.</a:t>
+            </a:r>
+          </a:p>
+          <a:p>
+            <a:r>
+              <a:t/>
+            </a:r>
+          </a:p>
+          <a:p>
+            <a:r>
+              <a:t>NEXT</a:t>
+            </a:r>
+          </a:p>
+          <a:p>
+            <a:r>
+              <a:t>Three shapes, and what each one allows you to say. Move on after a learner can explain the current example or required action.</a:t>
             </a:r>
           </a:p>
         </p:txBody>
@@ -6738,7 +9081,7 @@
                 </a:solidFill>
                 <a:latin typeface="Calibri"/>
               </a:rPr>
-              <a:t>Shape decides which statistic is honest. The distribution figure, then the real order values from the course data: mean well above median, a long tail, and a mean that is bigger than four orders in five. Percentiles as t</a:t>
+              <a:t>Shape decides which statistic is honest.</a:t>
             </a:r>
           </a:p>
         </p:txBody>
@@ -8208,7 +10551,7 @@
         <p:spPr>
           <a:xfrm>
             <a:off x="685800" y="1600200"/>
-            <a:ext cx="10820095" cy="1100371"/>
+            <a:ext cx="10820095" cy="1603291"/>
           </a:xfrm>
           <a:prstGeom prst="rect">
             <a:avLst/>
@@ -8249,7 +10592,7 @@
         </p:nvSpPr>
         <p:spPr>
           <a:xfrm>
-            <a:off x="685800" y="2792011"/>
+            <a:off x="685800" y="3477811"/>
             <a:ext cx="10820095" cy="457200"/>
           </a:xfrm>
           <a:prstGeom prst="rect">
@@ -11355,7 +13698,7 @@
         <p:spPr>
           <a:xfrm>
             <a:off x="685800" y="1911095"/>
-            <a:ext cx="10820095" cy="969264"/>
+            <a:ext cx="10820095" cy="1236629"/>
           </a:xfrm>
           <a:prstGeom prst="roundRect">
             <a:avLst>
@@ -11400,7 +13743,7 @@
         <p:spPr>
           <a:xfrm>
             <a:off x="978408" y="2112264"/>
-            <a:ext cx="10234879" cy="603504"/>
+            <a:ext cx="10234879" cy="870869"/>
           </a:xfrm>
           <a:prstGeom prst="rect">
             <a:avLst/>
@@ -11441,7 +13784,7 @@
         </p:nvSpPr>
         <p:spPr>
           <a:xfrm>
-            <a:off x="685800" y="3191256"/>
+            <a:off x="685800" y="3422045"/>
             <a:ext cx="10820095" cy="310896"/>
           </a:xfrm>
           <a:prstGeom prst="rect">
@@ -11467,7 +13810,7 @@
                 </a:solidFill>
                 <a:latin typeface="Calibri"/>
               </a:rPr>
-              <a:t>Work these questions in order:</a:t>
+              <a:t>Work these questions in order</a:t>
             </a:r>
           </a:p>
         </p:txBody>
@@ -11480,8 +13823,8 @@
         </p:nvSpPr>
         <p:spPr>
           <a:xfrm>
-            <a:off x="685800" y="3611879"/>
-            <a:ext cx="5227167" cy="365760"/>
+            <a:off x="685800" y="3897533"/>
+            <a:ext cx="5227167" cy="385501"/>
           </a:xfrm>
           <a:prstGeom prst="rect">
             <a:avLst/>
@@ -11509,7 +13852,7 @@
                 </a:solidFill>
                 <a:latin typeface="Calibri"/>
               </a:rPr>
-              <a:t>→  Draw the histogram first, before choosing anything.</a:t>
+              <a:t>Draw the histogram first, before choosing anything.</a:t>
             </a:r>
           </a:p>
         </p:txBody>
@@ -11522,8 +13865,8 @@
         </p:nvSpPr>
         <p:spPr>
           <a:xfrm>
-            <a:off x="685800" y="4032504"/>
-            <a:ext cx="5227167" cy="365760"/>
+            <a:off x="685800" y="4374475"/>
+            <a:ext cx="5227167" cy="385501"/>
           </a:xfrm>
           <a:prstGeom prst="rect">
             <a:avLst/>
@@ -11551,7 +13894,7 @@
                 </a:solidFill>
                 <a:latin typeface="Calibri"/>
               </a:rPr>
-              <a:t>→  Mean, median and the three percentiles.</a:t>
+              <a:t>Mean, median and the three percentiles.</a:t>
             </a:r>
           </a:p>
         </p:txBody>
@@ -11564,8 +13907,8 @@
         </p:nvSpPr>
         <p:spPr>
           <a:xfrm>
-            <a:off x="685800" y="4453128"/>
-            <a:ext cx="5227167" cy="365760"/>
+            <a:off x="685800" y="4851416"/>
+            <a:ext cx="5227167" cy="385501"/>
           </a:xfrm>
           <a:prstGeom prst="rect">
             <a:avLst/>
@@ -11593,7 +13936,7 @@
                 </a:solidFill>
                 <a:latin typeface="Calibri"/>
               </a:rPr>
-              <a:t>→  Which statistic describes this column honestly?</a:t>
+              <a:t>Which statistic describes this column honestly?</a:t>
             </a:r>
           </a:p>
         </p:txBody>
@@ -11606,8 +13949,8 @@
         </p:nvSpPr>
         <p:spPr>
           <a:xfrm>
-            <a:off x="6278727" y="3611879"/>
-            <a:ext cx="5227167" cy="365760"/>
+            <a:off x="6278727" y="3897533"/>
+            <a:ext cx="5227167" cy="385501"/>
           </a:xfrm>
           <a:prstGeom prst="rect">
             <a:avLst/>
@@ -11635,7 +13978,7 @@
                 </a:solidFill>
                 <a:latin typeface="Calibri"/>
               </a:rPr>
-              <a:t>→  One sentence: why would the other one mislead?</a:t>
+              <a:t>One sentence: why would the other one mislead?</a:t>
             </a:r>
           </a:p>
         </p:txBody>
@@ -11648,8 +13991,8 @@
         </p:nvSpPr>
         <p:spPr>
           <a:xfrm>
-            <a:off x="6278727" y="4032504"/>
-            <a:ext cx="5227167" cy="365760"/>
+            <a:off x="6278727" y="4374475"/>
+            <a:ext cx="5227167" cy="697851"/>
           </a:xfrm>
           <a:prstGeom prst="rect">
             <a:avLst/>
@@ -11677,7 +14020,7 @@
                 </a:solidFill>
                 <a:latin typeface="Calibri"/>
               </a:rPr>
-              <a:t>→  Then find a column where the mean IS the right answer, and say why.</a:t>
+              <a:t>Then find a column where the mean IS the right answer, and say why.</a:t>
             </a:r>
           </a:p>
         </p:txBody>
@@ -14899,7 +17242,7 @@
                 </a:solidFill>
                 <a:latin typeface="Calibri"/>
               </a:rPr>
-              <a:t>What a statistic is, before any particular one: one number standing in for many, which always throws something away. Then mean, median and mode computed by hand on ten numbers on the board, so nobody is taking AVERAGE on</a:t>
+              <a:t>What a statistic is, before any particular one: one number standing in for many, which always throws something away.</a:t>
             </a:r>
           </a:p>
         </p:txBody>
